--- a/modulo-01/01.02 - Aplicando Técnicas e Conceitos Básicos/01.02_ABAP_Moderno_Escreva_Menos_Realize_Mais.pptx
+++ b/modulo-01/01.02 - Aplicando Técnicas e Conceitos Básicos/01.02_ABAP_Moderno_Escreva_Menos_Realize_Mais.pptx
@@ -20592,7 +20592,7 @@
         </p:blipFill>
         <p:spPr>
           <a:xfrm>
-            <a:off x="11094415" y="3858768"/>
+            <a:off x="8275091" y="3858768"/>
             <a:ext cx="347472" cy="347472"/>
           </a:xfrm>
           <a:prstGeom prst="rect">
@@ -20616,7 +20616,7 @@
         </p:blipFill>
         <p:spPr>
           <a:xfrm>
-            <a:off x="8275091" y="3858768"/>
+            <a:off x="11094415" y="3858768"/>
             <a:ext cx="347472" cy="347472"/>
           </a:xfrm>
           <a:prstGeom prst="rect">
@@ -25482,7 +25482,7 @@
         </p:nvSpPr>
         <p:spPr>
           <a:xfrm>
-            <a:off x="548640" y="1645920"/>
+            <a:off x="548640" y="2491740"/>
             <a:ext cx="2602154" cy="2084832"/>
           </a:xfrm>
           <a:prstGeom prst="roundRect">
@@ -25516,7 +25516,7 @@
         </p:nvSpPr>
         <p:spPr>
           <a:xfrm>
-            <a:off x="749808" y="1847088"/>
+            <a:off x="749808" y="2692908"/>
             <a:ext cx="457200" cy="457200"/>
           </a:xfrm>
           <a:prstGeom prst="roundRect">
@@ -25538,7 +25538,7 @@
         </p:nvSpPr>
         <p:spPr>
           <a:xfrm>
-            <a:off x="749808" y="2450592"/>
+            <a:off x="749808" y="3296412"/>
             <a:ext cx="2199818" cy="1170432"/>
           </a:xfrm>
           <a:prstGeom prst="rect">
@@ -25610,7 +25610,7 @@
         </p:nvSpPr>
         <p:spPr>
           <a:xfrm>
-            <a:off x="3379394" y="1645920"/>
+            <a:off x="3379394" y="2491740"/>
             <a:ext cx="2602154" cy="2084832"/>
           </a:xfrm>
           <a:prstGeom prst="roundRect">
@@ -25644,7 +25644,7 @@
         </p:nvSpPr>
         <p:spPr>
           <a:xfrm>
-            <a:off x="3580562" y="1847088"/>
+            <a:off x="3580562" y="2692908"/>
             <a:ext cx="457200" cy="457200"/>
           </a:xfrm>
           <a:prstGeom prst="roundRect">
@@ -25666,7 +25666,7 @@
         </p:nvSpPr>
         <p:spPr>
           <a:xfrm>
-            <a:off x="3580562" y="2450592"/>
+            <a:off x="3580562" y="3296412"/>
             <a:ext cx="2199818" cy="1170432"/>
           </a:xfrm>
           <a:prstGeom prst="rect">
@@ -25719,7 +25719,7 @@
         </p:nvSpPr>
         <p:spPr>
           <a:xfrm>
-            <a:off x="6210148" y="1645920"/>
+            <a:off x="6210148" y="2491740"/>
             <a:ext cx="2602154" cy="2084832"/>
           </a:xfrm>
           <a:prstGeom prst="roundRect">
@@ -25753,7 +25753,7 @@
         </p:nvSpPr>
         <p:spPr>
           <a:xfrm>
-            <a:off x="6411316" y="1847088"/>
+            <a:off x="6411316" y="2692908"/>
             <a:ext cx="457200" cy="457200"/>
           </a:xfrm>
           <a:prstGeom prst="roundRect">
@@ -25775,7 +25775,7 @@
         </p:nvSpPr>
         <p:spPr>
           <a:xfrm>
-            <a:off x="6411316" y="2450592"/>
+            <a:off x="6411316" y="3296412"/>
             <a:ext cx="2199818" cy="1170432"/>
           </a:xfrm>
           <a:prstGeom prst="rect">
@@ -25866,7 +25866,7 @@
         </p:nvSpPr>
         <p:spPr>
           <a:xfrm>
-            <a:off x="9040901" y="1645920"/>
+            <a:off x="9040901" y="2491740"/>
             <a:ext cx="2602154" cy="2084832"/>
           </a:xfrm>
           <a:prstGeom prst="roundRect">
@@ -25900,7 +25900,7 @@
         </p:nvSpPr>
         <p:spPr>
           <a:xfrm>
-            <a:off x="9242069" y="1847088"/>
+            <a:off x="9242069" y="2692908"/>
             <a:ext cx="457200" cy="457200"/>
           </a:xfrm>
           <a:prstGeom prst="roundRect">
@@ -25922,7 +25922,7 @@
         </p:nvSpPr>
         <p:spPr>
           <a:xfrm>
-            <a:off x="9242069" y="2450592"/>
+            <a:off x="9242069" y="3296412"/>
             <a:ext cx="2199818" cy="1170432"/>
           </a:xfrm>
           <a:prstGeom prst="rect">
@@ -25975,7 +25975,7 @@
         </p:nvSpPr>
         <p:spPr>
           <a:xfrm>
-            <a:off x="548640" y="3913632"/>
+            <a:off x="548640" y="4759452"/>
             <a:ext cx="11094415" cy="566928"/>
           </a:xfrm>
           <a:prstGeom prst="roundRect">
@@ -25997,7 +25997,7 @@
         </p:nvSpPr>
         <p:spPr>
           <a:xfrm>
-            <a:off x="1207008" y="3913632"/>
+            <a:off x="1207008" y="4759452"/>
             <a:ext cx="10225735" cy="566928"/>
           </a:xfrm>
           <a:prstGeom prst="rect">
@@ -26065,7 +26065,7 @@
         </p:blipFill>
         <p:spPr>
           <a:xfrm>
-            <a:off x="850392" y="1947672"/>
+            <a:off x="850392" y="2793492"/>
             <a:ext cx="256032" cy="256032"/>
           </a:xfrm>
           <a:prstGeom prst="rect">
@@ -26089,7 +26089,7 @@
         </p:blipFill>
         <p:spPr>
           <a:xfrm>
-            <a:off x="6511900" y="1947672"/>
+            <a:off x="3681146" y="2793492"/>
             <a:ext cx="256032" cy="256032"/>
           </a:xfrm>
           <a:prstGeom prst="rect">
@@ -26113,7 +26113,7 @@
         </p:blipFill>
         <p:spPr>
           <a:xfrm>
-            <a:off x="3681146" y="1947672"/>
+            <a:off x="6511900" y="2793492"/>
             <a:ext cx="256032" cy="256032"/>
           </a:xfrm>
           <a:prstGeom prst="rect">
@@ -26137,8 +26137,8 @@
         </p:blipFill>
         <p:spPr>
           <a:xfrm>
-            <a:off x="749808" y="4041648"/>
-            <a:ext cx="310896" cy="310896"/>
+            <a:off x="9342653" y="2793492"/>
+            <a:ext cx="256032" cy="256032"/>
           </a:xfrm>
           <a:prstGeom prst="rect">
             <a:avLst/>
@@ -26161,8 +26161,8 @@
         </p:blipFill>
         <p:spPr>
           <a:xfrm>
-            <a:off x="9342653" y="1947672"/>
-            <a:ext cx="256032" cy="256032"/>
+            <a:off x="749808" y="4887468"/>
+            <a:ext cx="310896" cy="310896"/>
           </a:xfrm>
           <a:prstGeom prst="rect">
             <a:avLst/>
@@ -27064,7 +27064,7 @@
         </p:blipFill>
         <p:spPr>
           <a:xfrm>
-            <a:off x="6355080" y="1965960"/>
+            <a:off x="822960" y="1965960"/>
             <a:ext cx="256032" cy="256032"/>
           </a:xfrm>
           <a:prstGeom prst="rect">
@@ -27088,7 +27088,7 @@
         </p:blipFill>
         <p:spPr>
           <a:xfrm>
-            <a:off x="822960" y="1965960"/>
+            <a:off x="6355080" y="1965960"/>
             <a:ext cx="256032" cy="256032"/>
           </a:xfrm>
           <a:prstGeom prst="rect">
@@ -27112,7 +27112,7 @@
         </p:blipFill>
         <p:spPr>
           <a:xfrm>
-            <a:off x="822960" y="3886200"/>
+            <a:off x="822960" y="2926080"/>
             <a:ext cx="256032" cy="256032"/>
           </a:xfrm>
           <a:prstGeom prst="rect">
@@ -27136,7 +27136,7 @@
         </p:blipFill>
         <p:spPr>
           <a:xfrm>
-            <a:off x="6355080" y="3886200"/>
+            <a:off x="6355080" y="2926080"/>
             <a:ext cx="256032" cy="256032"/>
           </a:xfrm>
           <a:prstGeom prst="rect">
@@ -27160,7 +27160,7 @@
         </p:blipFill>
         <p:spPr>
           <a:xfrm>
-            <a:off x="6355080" y="2926080"/>
+            <a:off x="822960" y="3886200"/>
             <a:ext cx="256032" cy="256032"/>
           </a:xfrm>
           <a:prstGeom prst="rect">
@@ -27184,7 +27184,7 @@
         </p:blipFill>
         <p:spPr>
           <a:xfrm>
-            <a:off x="822960" y="2926080"/>
+            <a:off x="6355080" y="3886200"/>
             <a:ext cx="256032" cy="256032"/>
           </a:xfrm>
           <a:prstGeom prst="rect">
@@ -27377,7 +27377,7 @@
         </p:nvSpPr>
         <p:spPr>
           <a:xfrm>
-            <a:off x="548640" y="2194560"/>
+            <a:off x="548640" y="2741295"/>
             <a:ext cx="3545738" cy="2134362"/>
           </a:xfrm>
           <a:prstGeom prst="roundRect">
@@ -27411,7 +27411,7 @@
         </p:nvSpPr>
         <p:spPr>
           <a:xfrm>
-            <a:off x="749808" y="2395728"/>
+            <a:off x="749808" y="2942463"/>
             <a:ext cx="457200" cy="457200"/>
           </a:xfrm>
           <a:prstGeom prst="roundRect">
@@ -27433,7 +27433,7 @@
         </p:nvSpPr>
         <p:spPr>
           <a:xfrm>
-            <a:off x="2400910" y="2468880"/>
+            <a:off x="2400910" y="3015615"/>
             <a:ext cx="1492301" cy="274320"/>
           </a:xfrm>
           <a:prstGeom prst="roundRect">
@@ -27455,7 +27455,7 @@
         </p:nvSpPr>
         <p:spPr>
           <a:xfrm>
-            <a:off x="2400910" y="2468880"/>
+            <a:off x="2400910" y="3015615"/>
             <a:ext cx="1492301" cy="274320"/>
           </a:xfrm>
           <a:prstGeom prst="rect">
@@ -27491,7 +27491,7 @@
         </p:nvSpPr>
         <p:spPr>
           <a:xfrm>
-            <a:off x="749808" y="2999232"/>
+            <a:off x="749808" y="3545967"/>
             <a:ext cx="3143402" cy="1219962"/>
           </a:xfrm>
           <a:prstGeom prst="rect">
@@ -27544,7 +27544,7 @@
         </p:nvSpPr>
         <p:spPr>
           <a:xfrm>
-            <a:off x="4322978" y="2194560"/>
+            <a:off x="4322978" y="2741295"/>
             <a:ext cx="3545738" cy="2134362"/>
           </a:xfrm>
           <a:prstGeom prst="roundRect">
@@ -27578,7 +27578,7 @@
         </p:nvSpPr>
         <p:spPr>
           <a:xfrm>
-            <a:off x="4524146" y="2395728"/>
+            <a:off x="4524146" y="2942463"/>
             <a:ext cx="457200" cy="457200"/>
           </a:xfrm>
           <a:prstGeom prst="roundRect">
@@ -27600,7 +27600,7 @@
         </p:nvSpPr>
         <p:spPr>
           <a:xfrm>
-            <a:off x="6658051" y="2468880"/>
+            <a:off x="6658051" y="3015615"/>
             <a:ext cx="1009498" cy="274320"/>
           </a:xfrm>
           <a:prstGeom prst="roundRect">
@@ -27622,7 +27622,7 @@
         </p:nvSpPr>
         <p:spPr>
           <a:xfrm>
-            <a:off x="6658051" y="2468880"/>
+            <a:off x="6658051" y="3015615"/>
             <a:ext cx="1009498" cy="274320"/>
           </a:xfrm>
           <a:prstGeom prst="rect">
@@ -27658,7 +27658,7 @@
         </p:nvSpPr>
         <p:spPr>
           <a:xfrm>
-            <a:off x="4524146" y="2999232"/>
+            <a:off x="4524146" y="3545967"/>
             <a:ext cx="3143402" cy="1219962"/>
           </a:xfrm>
           <a:prstGeom prst="rect">
@@ -27711,7 +27711,7 @@
         </p:nvSpPr>
         <p:spPr>
           <a:xfrm>
-            <a:off x="8097317" y="2194560"/>
+            <a:off x="8097317" y="2741295"/>
             <a:ext cx="3545738" cy="2134362"/>
           </a:xfrm>
           <a:prstGeom prst="roundRect">
@@ -27745,7 +27745,7 @@
         </p:nvSpPr>
         <p:spPr>
           <a:xfrm>
-            <a:off x="8298485" y="2395728"/>
+            <a:off x="8298485" y="2942463"/>
             <a:ext cx="457200" cy="457200"/>
           </a:xfrm>
           <a:prstGeom prst="roundRect">
@@ -27767,7 +27767,7 @@
         </p:nvSpPr>
         <p:spPr>
           <a:xfrm>
-            <a:off x="10432390" y="2468880"/>
+            <a:off x="10432390" y="3015615"/>
             <a:ext cx="1009498" cy="274320"/>
           </a:xfrm>
           <a:prstGeom prst="roundRect">
@@ -27789,7 +27789,7 @@
         </p:nvSpPr>
         <p:spPr>
           <a:xfrm>
-            <a:off x="10432390" y="2468880"/>
+            <a:off x="10432390" y="3015615"/>
             <a:ext cx="1009498" cy="274320"/>
           </a:xfrm>
           <a:prstGeom prst="rect">
@@ -27825,7 +27825,7 @@
         </p:nvSpPr>
         <p:spPr>
           <a:xfrm>
-            <a:off x="8298485" y="2999232"/>
+            <a:off x="8298485" y="3545967"/>
             <a:ext cx="3143402" cy="1219962"/>
           </a:xfrm>
           <a:prstGeom prst="rect">
@@ -27894,7 +27894,7 @@
         </p:nvSpPr>
         <p:spPr>
           <a:xfrm>
-            <a:off x="548640" y="4511802"/>
+            <a:off x="548640" y="5058537"/>
             <a:ext cx="11094415" cy="566928"/>
           </a:xfrm>
           <a:prstGeom prst="roundRect">
@@ -27916,7 +27916,7 @@
         </p:nvSpPr>
         <p:spPr>
           <a:xfrm>
-            <a:off x="1207008" y="4511802"/>
+            <a:off x="1207008" y="5058537"/>
             <a:ext cx="10225735" cy="566928"/>
           </a:xfrm>
           <a:prstGeom prst="rect">
@@ -27968,7 +27968,7 @@
         </p:blipFill>
         <p:spPr>
           <a:xfrm>
-            <a:off x="850392" y="2496312"/>
+            <a:off x="850392" y="3043047"/>
             <a:ext cx="256032" cy="256032"/>
           </a:xfrm>
           <a:prstGeom prst="rect">
@@ -27992,7 +27992,7 @@
         </p:blipFill>
         <p:spPr>
           <a:xfrm>
-            <a:off x="8399069" y="2496312"/>
+            <a:off x="4624730" y="3043047"/>
             <a:ext cx="256032" cy="256032"/>
           </a:xfrm>
           <a:prstGeom prst="rect">
@@ -28016,7 +28016,7 @@
         </p:blipFill>
         <p:spPr>
           <a:xfrm>
-            <a:off x="4624730" y="2496312"/>
+            <a:off x="8399069" y="3043047"/>
             <a:ext cx="256032" cy="256032"/>
           </a:xfrm>
           <a:prstGeom prst="rect">
@@ -28040,7 +28040,7 @@
         </p:blipFill>
         <p:spPr>
           <a:xfrm>
-            <a:off x="749808" y="4639818"/>
+            <a:off x="749808" y="5186553"/>
             <a:ext cx="310896" cy="310896"/>
           </a:xfrm>
           <a:prstGeom prst="rect">
@@ -28690,7 +28690,7 @@
         </p:nvSpPr>
         <p:spPr>
           <a:xfrm>
-            <a:off x="548640" y="1645920"/>
+            <a:off x="548640" y="2359660"/>
             <a:ext cx="3545738" cy="2348992"/>
           </a:xfrm>
           <a:prstGeom prst="roundRect">
@@ -28724,7 +28724,7 @@
         </p:nvSpPr>
         <p:spPr>
           <a:xfrm>
-            <a:off x="749808" y="1847088"/>
+            <a:off x="749808" y="2560828"/>
             <a:ext cx="457200" cy="457200"/>
           </a:xfrm>
           <a:prstGeom prst="roundRect">
@@ -28746,7 +28746,7 @@
         </p:nvSpPr>
         <p:spPr>
           <a:xfrm>
-            <a:off x="749808" y="2450592"/>
+            <a:off x="749808" y="3164332"/>
             <a:ext cx="3143402" cy="1434592"/>
           </a:xfrm>
           <a:prstGeom prst="rect">
@@ -28799,7 +28799,7 @@
         </p:nvSpPr>
         <p:spPr>
           <a:xfrm>
-            <a:off x="4322978" y="1645920"/>
+            <a:off x="4322978" y="2359660"/>
             <a:ext cx="3545738" cy="2348992"/>
           </a:xfrm>
           <a:prstGeom prst="roundRect">
@@ -28833,7 +28833,7 @@
         </p:nvSpPr>
         <p:spPr>
           <a:xfrm>
-            <a:off x="4524146" y="1847088"/>
+            <a:off x="4524146" y="2560828"/>
             <a:ext cx="457200" cy="457200"/>
           </a:xfrm>
           <a:prstGeom prst="roundRect">
@@ -28855,7 +28855,7 @@
         </p:nvSpPr>
         <p:spPr>
           <a:xfrm>
-            <a:off x="4524146" y="2450592"/>
+            <a:off x="4524146" y="3164332"/>
             <a:ext cx="3143402" cy="1434592"/>
           </a:xfrm>
           <a:prstGeom prst="rect">
@@ -28927,7 +28927,7 @@
         </p:nvSpPr>
         <p:spPr>
           <a:xfrm>
-            <a:off x="8097317" y="1645920"/>
+            <a:off x="8097317" y="2359660"/>
             <a:ext cx="3545738" cy="2348992"/>
           </a:xfrm>
           <a:prstGeom prst="roundRect">
@@ -28961,7 +28961,7 @@
         </p:nvSpPr>
         <p:spPr>
           <a:xfrm>
-            <a:off x="8298485" y="1847088"/>
+            <a:off x="8298485" y="2560828"/>
             <a:ext cx="457200" cy="457200"/>
           </a:xfrm>
           <a:prstGeom prst="roundRect">
@@ -28983,7 +28983,7 @@
         </p:nvSpPr>
         <p:spPr>
           <a:xfrm>
-            <a:off x="8298485" y="2450592"/>
+            <a:off x="8298485" y="3164332"/>
             <a:ext cx="3143402" cy="1434592"/>
           </a:xfrm>
           <a:prstGeom prst="rect">
@@ -29036,7 +29036,7 @@
         </p:nvSpPr>
         <p:spPr>
           <a:xfrm>
-            <a:off x="548640" y="4177792"/>
+            <a:off x="548640" y="4891532"/>
             <a:ext cx="11094415" cy="566928"/>
           </a:xfrm>
           <a:prstGeom prst="roundRect">
@@ -29058,7 +29058,7 @@
         </p:nvSpPr>
         <p:spPr>
           <a:xfrm>
-            <a:off x="1207008" y="4177792"/>
+            <a:off x="1207008" y="4891532"/>
             <a:ext cx="10225735" cy="566928"/>
           </a:xfrm>
           <a:prstGeom prst="rect">
@@ -29110,7 +29110,7 @@
         </p:blipFill>
         <p:spPr>
           <a:xfrm>
-            <a:off x="4624730" y="1947672"/>
+            <a:off x="850392" y="2661412"/>
             <a:ext cx="256032" cy="256032"/>
           </a:xfrm>
           <a:prstGeom prst="rect">
@@ -29134,7 +29134,7 @@
         </p:blipFill>
         <p:spPr>
           <a:xfrm>
-            <a:off x="850392" y="1947672"/>
+            <a:off x="4624730" y="2661412"/>
             <a:ext cx="256032" cy="256032"/>
           </a:xfrm>
           <a:prstGeom prst="rect">
@@ -29158,7 +29158,7 @@
         </p:blipFill>
         <p:spPr>
           <a:xfrm>
-            <a:off x="8399069" y="1947672"/>
+            <a:off x="8399069" y="2661412"/>
             <a:ext cx="256032" cy="256032"/>
           </a:xfrm>
           <a:prstGeom prst="rect">
@@ -29182,7 +29182,7 @@
         </p:blipFill>
         <p:spPr>
           <a:xfrm>
-            <a:off x="749808" y="4305808"/>
+            <a:off x="749808" y="5019548"/>
             <a:ext cx="310896" cy="310896"/>
           </a:xfrm>
           <a:prstGeom prst="rect">
